--- a/make_presentation/templates/templates/premium/no_logo_11.pptx
+++ b/make_presentation/templates/templates/premium/no_logo_11.pptx
@@ -120,7 +120,13 @@
               <a:rPr b="0" lang="en-US" sz="2000" spc="-1" strike="noStrike">
                 <a:latin typeface="Arial"/>
               </a:rPr>
-              <a:t>Click to edit the notes format</a:t>
+              <a:t>Click to edit the notes </a:t>
+            </a:r>
+            <a:r>
+              <a:rPr b="0" lang="en-US" sz="2000" spc="-1" strike="noStrike">
+                <a:latin typeface="Arial"/>
+              </a:rPr>
+              <a:t>format</a:t>
             </a:r>
             <a:endParaRPr b="0" lang="en-US" sz="2000" spc="-1" strike="noStrike">
               <a:latin typeface="Arial"/>
@@ -305,7 +311,7 @@
             <a:pPr algn="r">
               <a:buNone/>
             </a:pPr>
-            <a:fld id="{733B2418-615B-4B49-9B52-089148C6B146}" type="slidenum">
+            <a:fld id="{A5F39D76-8A73-4C58-A576-6C380416879A}" type="slidenum">
               <a:rPr b="0" lang="en-US" sz="1400" spc="-1" strike="noStrike">
                 <a:latin typeface="Times New Roman"/>
               </a:rPr>
@@ -342,7 +348,7 @@
       </p:grpSpPr>
       <p:sp>
         <p:nvSpPr>
-          <p:cNvPr id="171" name="PlaceHolder 1"/>
+          <p:cNvPr id="169" name="PlaceHolder 1"/>
           <p:cNvSpPr>
             <a:spLocks noGrp="1"/>
           </p:cNvSpPr>
@@ -365,7 +371,7 @@
       </p:sp>
       <p:sp>
         <p:nvSpPr>
-          <p:cNvPr id="172" name="PlaceHolder 2"/>
+          <p:cNvPr id="170" name="PlaceHolder 2"/>
           <p:cNvSpPr>
             <a:spLocks noGrp="1"/>
           </p:cNvSpPr>
@@ -399,7 +405,7 @@
       </p:sp>
       <p:sp>
         <p:nvSpPr>
-          <p:cNvPr id="173" name="PlaceHolder 3"/>
+          <p:cNvPr id="171" name="PlaceHolder 3"/>
           <p:cNvSpPr>
             <a:spLocks noGrp="1"/>
           </p:cNvSpPr>
@@ -446,7 +452,7 @@
               </a:lnSpc>
               <a:buNone/>
             </a:pPr>
-            <a:fld id="{1856F527-45CC-4BEB-B55B-9EC4B8F67BF3}" type="slidenum">
+            <a:fld id="{32D6A915-4BA4-400D-90C2-E269DB0FF3CA}" type="slidenum">
               <a:rPr b="0" lang="en-US" sz="1800" spc="-1" strike="noStrike">
                 <a:solidFill>
                   <a:srgbClr val="000000"/>
@@ -486,7 +492,7 @@
       </p:grpSpPr>
       <p:sp>
         <p:nvSpPr>
-          <p:cNvPr id="198" name="PlaceHolder 1"/>
+          <p:cNvPr id="196" name="PlaceHolder 1"/>
           <p:cNvSpPr>
             <a:spLocks noGrp="1"/>
           </p:cNvSpPr>
@@ -509,7 +515,7 @@
       </p:sp>
       <p:sp>
         <p:nvSpPr>
-          <p:cNvPr id="199" name="PlaceHolder 2"/>
+          <p:cNvPr id="197" name="PlaceHolder 2"/>
           <p:cNvSpPr>
             <a:spLocks noGrp="1"/>
           </p:cNvSpPr>
@@ -543,7 +549,7 @@
       </p:sp>
       <p:sp>
         <p:nvSpPr>
-          <p:cNvPr id="200" name="PlaceHolder 3"/>
+          <p:cNvPr id="198" name="PlaceHolder 3"/>
           <p:cNvSpPr>
             <a:spLocks noGrp="1"/>
           </p:cNvSpPr>
@@ -590,7 +596,7 @@
               </a:lnSpc>
               <a:buNone/>
             </a:pPr>
-            <a:fld id="{58685AA6-372C-4719-992A-6DF51D6EA1A9}" type="slidenum">
+            <a:fld id="{AC5F9EA6-9440-487C-A718-8983CA3B1855}" type="slidenum">
               <a:rPr b="0" lang="en-US" sz="1800" spc="-1" strike="noStrike">
                 <a:solidFill>
                   <a:srgbClr val="000000"/>
@@ -630,7 +636,7 @@
       </p:grpSpPr>
       <p:sp>
         <p:nvSpPr>
-          <p:cNvPr id="201" name="PlaceHolder 1"/>
+          <p:cNvPr id="199" name="PlaceHolder 1"/>
           <p:cNvSpPr>
             <a:spLocks noGrp="1"/>
           </p:cNvSpPr>
@@ -653,7 +659,7 @@
       </p:sp>
       <p:sp>
         <p:nvSpPr>
-          <p:cNvPr id="202" name="PlaceHolder 2"/>
+          <p:cNvPr id="200" name="PlaceHolder 2"/>
           <p:cNvSpPr>
             <a:spLocks noGrp="1"/>
           </p:cNvSpPr>
@@ -687,7 +693,7 @@
       </p:sp>
       <p:sp>
         <p:nvSpPr>
-          <p:cNvPr id="203" name="PlaceHolder 3"/>
+          <p:cNvPr id="201" name="PlaceHolder 3"/>
           <p:cNvSpPr>
             <a:spLocks noGrp="1"/>
           </p:cNvSpPr>
@@ -734,7 +740,7 @@
               </a:lnSpc>
               <a:buNone/>
             </a:pPr>
-            <a:fld id="{470E65D9-26AB-4C91-B828-339B1AB96022}" type="slidenum">
+            <a:fld id="{1D7697FA-1B61-4F58-96C1-87E4E4CCC272}" type="slidenum">
               <a:rPr b="0" lang="en-US" sz="1800" spc="-1" strike="noStrike">
                 <a:solidFill>
                   <a:srgbClr val="000000"/>
@@ -774,7 +780,7 @@
       </p:grpSpPr>
       <p:sp>
         <p:nvSpPr>
-          <p:cNvPr id="174" name="PlaceHolder 1"/>
+          <p:cNvPr id="172" name="PlaceHolder 1"/>
           <p:cNvSpPr>
             <a:spLocks noGrp="1"/>
           </p:cNvSpPr>
@@ -797,7 +803,7 @@
       </p:sp>
       <p:sp>
         <p:nvSpPr>
-          <p:cNvPr id="175" name="PlaceHolder 2"/>
+          <p:cNvPr id="173" name="PlaceHolder 2"/>
           <p:cNvSpPr>
             <a:spLocks noGrp="1"/>
           </p:cNvSpPr>
@@ -831,7 +837,7 @@
       </p:sp>
       <p:sp>
         <p:nvSpPr>
-          <p:cNvPr id="176" name="PlaceHolder 3"/>
+          <p:cNvPr id="174" name="PlaceHolder 3"/>
           <p:cNvSpPr>
             <a:spLocks noGrp="1"/>
           </p:cNvSpPr>
@@ -878,7 +884,7 @@
               </a:lnSpc>
               <a:buNone/>
             </a:pPr>
-            <a:fld id="{FEFA4F17-E289-421B-BA36-A068A69F20C9}" type="slidenum">
+            <a:fld id="{929B9396-4F6E-4F63-A31C-0A3D6C005ADE}" type="slidenum">
               <a:rPr b="0" lang="en-US" sz="1800" spc="-1" strike="noStrike">
                 <a:solidFill>
                   <a:srgbClr val="000000"/>
@@ -918,7 +924,7 @@
       </p:grpSpPr>
       <p:sp>
         <p:nvSpPr>
-          <p:cNvPr id="177" name="PlaceHolder 1"/>
+          <p:cNvPr id="175" name="PlaceHolder 1"/>
           <p:cNvSpPr>
             <a:spLocks noGrp="1"/>
           </p:cNvSpPr>
@@ -941,7 +947,7 @@
       </p:sp>
       <p:sp>
         <p:nvSpPr>
-          <p:cNvPr id="178" name="PlaceHolder 2"/>
+          <p:cNvPr id="176" name="PlaceHolder 2"/>
           <p:cNvSpPr>
             <a:spLocks noGrp="1"/>
           </p:cNvSpPr>
@@ -975,7 +981,7 @@
       </p:sp>
       <p:sp>
         <p:nvSpPr>
-          <p:cNvPr id="179" name="PlaceHolder 3"/>
+          <p:cNvPr id="177" name="PlaceHolder 3"/>
           <p:cNvSpPr>
             <a:spLocks noGrp="1"/>
           </p:cNvSpPr>
@@ -1022,7 +1028,7 @@
               </a:lnSpc>
               <a:buNone/>
             </a:pPr>
-            <a:fld id="{2A07C686-C6B5-4DDD-882E-E1EC359D8E7F}" type="slidenum">
+            <a:fld id="{36F5DD68-5B69-4886-93E6-700E8958DE36}" type="slidenum">
               <a:rPr b="0" lang="en-US" sz="1800" spc="-1" strike="noStrike">
                 <a:solidFill>
                   <a:srgbClr val="000000"/>
@@ -1062,7 +1068,7 @@
       </p:grpSpPr>
       <p:sp>
         <p:nvSpPr>
-          <p:cNvPr id="180" name="PlaceHolder 1"/>
+          <p:cNvPr id="178" name="PlaceHolder 1"/>
           <p:cNvSpPr>
             <a:spLocks noGrp="1"/>
           </p:cNvSpPr>
@@ -1085,7 +1091,7 @@
       </p:sp>
       <p:sp>
         <p:nvSpPr>
-          <p:cNvPr id="181" name="PlaceHolder 2"/>
+          <p:cNvPr id="179" name="PlaceHolder 2"/>
           <p:cNvSpPr>
             <a:spLocks noGrp="1"/>
           </p:cNvSpPr>
@@ -1119,7 +1125,7 @@
       </p:sp>
       <p:sp>
         <p:nvSpPr>
-          <p:cNvPr id="182" name="PlaceHolder 3"/>
+          <p:cNvPr id="180" name="PlaceHolder 3"/>
           <p:cNvSpPr>
             <a:spLocks noGrp="1"/>
           </p:cNvSpPr>
@@ -1166,7 +1172,7 @@
               </a:lnSpc>
               <a:buNone/>
             </a:pPr>
-            <a:fld id="{E433C484-7373-4F9B-BD25-3A7C7A8922BD}" type="slidenum">
+            <a:fld id="{FA389554-B1B2-49A7-B33A-756DFABF47CB}" type="slidenum">
               <a:rPr b="0" lang="en-US" sz="1800" spc="-1" strike="noStrike">
                 <a:solidFill>
                   <a:srgbClr val="000000"/>
@@ -1206,7 +1212,7 @@
       </p:grpSpPr>
       <p:sp>
         <p:nvSpPr>
-          <p:cNvPr id="183" name="PlaceHolder 1"/>
+          <p:cNvPr id="181" name="PlaceHolder 1"/>
           <p:cNvSpPr>
             <a:spLocks noGrp="1"/>
           </p:cNvSpPr>
@@ -1229,7 +1235,7 @@
       </p:sp>
       <p:sp>
         <p:nvSpPr>
-          <p:cNvPr id="184" name="PlaceHolder 2"/>
+          <p:cNvPr id="182" name="PlaceHolder 2"/>
           <p:cNvSpPr>
             <a:spLocks noGrp="1"/>
           </p:cNvSpPr>
@@ -1263,7 +1269,7 @@
       </p:sp>
       <p:sp>
         <p:nvSpPr>
-          <p:cNvPr id="185" name="PlaceHolder 3"/>
+          <p:cNvPr id="183" name="PlaceHolder 3"/>
           <p:cNvSpPr>
             <a:spLocks noGrp="1"/>
           </p:cNvSpPr>
@@ -1310,7 +1316,7 @@
               </a:lnSpc>
               <a:buNone/>
             </a:pPr>
-            <a:fld id="{8F2CC54A-69D8-4475-AD54-893B13BD4082}" type="slidenum">
+            <a:fld id="{A7D88559-C504-4A58-8723-62EAA5D23393}" type="slidenum">
               <a:rPr b="0" lang="en-US" sz="1800" spc="-1" strike="noStrike">
                 <a:solidFill>
                   <a:srgbClr val="000000"/>
@@ -1350,7 +1356,7 @@
       </p:grpSpPr>
       <p:sp>
         <p:nvSpPr>
-          <p:cNvPr id="186" name="PlaceHolder 1"/>
+          <p:cNvPr id="184" name="PlaceHolder 1"/>
           <p:cNvSpPr>
             <a:spLocks noGrp="1"/>
           </p:cNvSpPr>
@@ -1373,7 +1379,7 @@
       </p:sp>
       <p:sp>
         <p:nvSpPr>
-          <p:cNvPr id="187" name="PlaceHolder 2"/>
+          <p:cNvPr id="185" name="PlaceHolder 2"/>
           <p:cNvSpPr>
             <a:spLocks noGrp="1"/>
           </p:cNvSpPr>
@@ -1407,7 +1413,7 @@
       </p:sp>
       <p:sp>
         <p:nvSpPr>
-          <p:cNvPr id="188" name="PlaceHolder 3"/>
+          <p:cNvPr id="186" name="PlaceHolder 3"/>
           <p:cNvSpPr>
             <a:spLocks noGrp="1"/>
           </p:cNvSpPr>
@@ -1454,7 +1460,7 @@
               </a:lnSpc>
               <a:buNone/>
             </a:pPr>
-            <a:fld id="{2E745995-F677-45BB-8130-4D49D93D5357}" type="slidenum">
+            <a:fld id="{6A5225CA-BA8A-4E07-9D7F-4B44E3C93BB2}" type="slidenum">
               <a:rPr b="0" lang="en-US" sz="1800" spc="-1" strike="noStrike">
                 <a:solidFill>
                   <a:srgbClr val="000000"/>
@@ -1494,7 +1500,7 @@
       </p:grpSpPr>
       <p:sp>
         <p:nvSpPr>
-          <p:cNvPr id="189" name="PlaceHolder 1"/>
+          <p:cNvPr id="187" name="PlaceHolder 1"/>
           <p:cNvSpPr>
             <a:spLocks noGrp="1"/>
           </p:cNvSpPr>
@@ -1517,7 +1523,7 @@
       </p:sp>
       <p:sp>
         <p:nvSpPr>
-          <p:cNvPr id="190" name="PlaceHolder 2"/>
+          <p:cNvPr id="188" name="PlaceHolder 2"/>
           <p:cNvSpPr>
             <a:spLocks noGrp="1"/>
           </p:cNvSpPr>
@@ -1551,7 +1557,7 @@
       </p:sp>
       <p:sp>
         <p:nvSpPr>
-          <p:cNvPr id="191" name="PlaceHolder 3"/>
+          <p:cNvPr id="189" name="PlaceHolder 3"/>
           <p:cNvSpPr>
             <a:spLocks noGrp="1"/>
           </p:cNvSpPr>
@@ -1598,7 +1604,7 @@
               </a:lnSpc>
               <a:buNone/>
             </a:pPr>
-            <a:fld id="{7C24FE6A-371D-47A9-A040-3BE28019B2B7}" type="slidenum">
+            <a:fld id="{E1D48085-0D97-424A-BC86-306BA1B2F5EB}" type="slidenum">
               <a:rPr b="0" lang="en-US" sz="1800" spc="-1" strike="noStrike">
                 <a:solidFill>
                   <a:srgbClr val="000000"/>
@@ -1638,7 +1644,7 @@
       </p:grpSpPr>
       <p:sp>
         <p:nvSpPr>
-          <p:cNvPr id="192" name="PlaceHolder 1"/>
+          <p:cNvPr id="190" name="PlaceHolder 1"/>
           <p:cNvSpPr>
             <a:spLocks noGrp="1"/>
           </p:cNvSpPr>
@@ -1661,7 +1667,7 @@
       </p:sp>
       <p:sp>
         <p:nvSpPr>
-          <p:cNvPr id="193" name="PlaceHolder 2"/>
+          <p:cNvPr id="191" name="PlaceHolder 2"/>
           <p:cNvSpPr>
             <a:spLocks noGrp="1"/>
           </p:cNvSpPr>
@@ -1695,7 +1701,7 @@
       </p:sp>
       <p:sp>
         <p:nvSpPr>
-          <p:cNvPr id="194" name="PlaceHolder 3"/>
+          <p:cNvPr id="192" name="PlaceHolder 3"/>
           <p:cNvSpPr>
             <a:spLocks noGrp="1"/>
           </p:cNvSpPr>
@@ -1742,7 +1748,7 @@
               </a:lnSpc>
               <a:buNone/>
             </a:pPr>
-            <a:fld id="{CE0867E9-1481-4593-B4BA-6AFAC2CCFC2E}" type="slidenum">
+            <a:fld id="{F1D8B096-29B9-48CA-B903-67A71C168BF5}" type="slidenum">
               <a:rPr b="0" lang="en-US" sz="1800" spc="-1" strike="noStrike">
                 <a:solidFill>
                   <a:srgbClr val="000000"/>
@@ -1782,7 +1788,7 @@
       </p:grpSpPr>
       <p:sp>
         <p:nvSpPr>
-          <p:cNvPr id="195" name="PlaceHolder 1"/>
+          <p:cNvPr id="193" name="PlaceHolder 1"/>
           <p:cNvSpPr>
             <a:spLocks noGrp="1"/>
           </p:cNvSpPr>
@@ -1805,7 +1811,7 @@
       </p:sp>
       <p:sp>
         <p:nvSpPr>
-          <p:cNvPr id="196" name="PlaceHolder 2"/>
+          <p:cNvPr id="194" name="PlaceHolder 2"/>
           <p:cNvSpPr>
             <a:spLocks noGrp="1"/>
           </p:cNvSpPr>
@@ -1839,7 +1845,7 @@
       </p:sp>
       <p:sp>
         <p:nvSpPr>
-          <p:cNvPr id="197" name="PlaceHolder 3"/>
+          <p:cNvPr id="195" name="PlaceHolder 3"/>
           <p:cNvSpPr>
             <a:spLocks noGrp="1"/>
           </p:cNvSpPr>
@@ -1886,7 +1892,7 @@
               </a:lnSpc>
               <a:buNone/>
             </a:pPr>
-            <a:fld id="{A2F9CBB0-B969-4CF4-A05A-ED4A5EDD9033}" type="slidenum">
+            <a:fld id="{18F93BA0-9F8B-4707-86E8-1388B5C07C76}" type="slidenum">
               <a:rPr b="0" lang="en-US" sz="1800" spc="-1" strike="noStrike">
                 <a:solidFill>
                   <a:srgbClr val="000000"/>
@@ -3929,7 +3935,7 @@
         <p:spPr>
           <a:xfrm>
             <a:off x="457200" y="4027680"/>
-            <a:ext cx="10515600" cy="2030760"/>
+            <a:ext cx="10928880" cy="2030760"/>
           </a:xfrm>
           <a:prstGeom prst="rect">
             <a:avLst/>
@@ -3960,7 +3966,7 @@
               </a:tabLst>
             </a:pPr>
             <a:r>
-              <a:rPr b="1" lang="en-US" sz="4000" spc="-1" strike="noStrike">
+              <a:rPr b="1" lang="en-US" sz="4800" spc="-1" strike="noStrike">
                 <a:solidFill>
                   <a:srgbClr val="ffffff"/>
                 </a:solidFill>
@@ -3969,7 +3975,7 @@
               </a:rPr>
               <a:t>TITLE</a:t>
             </a:r>
-            <a:endParaRPr b="0" lang="en-US" sz="4000" spc="-1" strike="noStrike">
+            <a:endParaRPr b="0" lang="en-US" sz="4800" spc="-1" strike="noStrike">
               <a:latin typeface="Arial"/>
             </a:endParaRPr>
           </a:p>
@@ -4037,7 +4043,7 @@
       </p:grpSpPr>
       <p:sp>
         <p:nvSpPr>
-          <p:cNvPr id="150" name="PIC"/>
+          <p:cNvPr id="148" name="PIC"/>
           <p:cNvSpPr/>
           <p:nvPr/>
         </p:nvSpPr>
@@ -4093,7 +4099,7 @@
       </p:sp>
       <p:sp>
         <p:nvSpPr>
-          <p:cNvPr id="151" name="Линия_1"/>
+          <p:cNvPr id="149" name="Линия_1"/>
           <p:cNvSpPr/>
           <p:nvPr/>
         </p:nvSpPr>
@@ -4121,7 +4127,7 @@
       </p:sp>
       <p:sp>
         <p:nvSpPr>
-          <p:cNvPr id="152" name="SUBTITLE 2"/>
+          <p:cNvPr id="150" name="SUBTITLE 2"/>
           <p:cNvSpPr/>
           <p:nvPr/>
         </p:nvSpPr>
@@ -4176,7 +4182,7 @@
       </p:sp>
       <p:sp>
         <p:nvSpPr>
-          <p:cNvPr id="153" name="TEXT 2"/>
+          <p:cNvPr id="151" name="TEXT 2"/>
           <p:cNvSpPr/>
           <p:nvPr/>
         </p:nvSpPr>
@@ -4231,7 +4237,7 @@
       </p:sp>
       <p:pic>
         <p:nvPicPr>
-          <p:cNvPr id="154" name="Кнопка_Навигация_Фон" descr="/home/claude/vistas/assets/grad_circle.png"/>
+          <p:cNvPr id="152" name="Кнопка_Навигация_Фон" descr="/home/claude/vistas/assets/grad_circle.png"/>
           <p:cNvPicPr/>
           <p:nvPr/>
         </p:nvPicPr>
@@ -4254,7 +4260,7 @@
       </p:pic>
       <p:sp>
         <p:nvSpPr>
-          <p:cNvPr id="155" name="Кнопка_Навигация_Стрелка"/>
+          <p:cNvPr id="153" name="Кнопка_Навигация_Стрелка"/>
           <p:cNvSpPr/>
           <p:nvPr/>
         </p:nvSpPr>
@@ -4309,7 +4315,7 @@
       </p:sp>
       <p:sp>
         <p:nvSpPr>
-          <p:cNvPr id="156" name="TITLE"/>
+          <p:cNvPr id="154" name="TITLE"/>
           <p:cNvSpPr/>
           <p:nvPr/>
         </p:nvSpPr>
@@ -4364,7 +4370,7 @@
       </p:sp>
       <p:sp>
         <p:nvSpPr>
-          <p:cNvPr id="157" name="Иконка_1"/>
+          <p:cNvPr id="155" name="Иконка_1"/>
           <p:cNvSpPr/>
           <p:nvPr/>
         </p:nvSpPr>
@@ -4397,7 +4403,7 @@
       </p:sp>
       <p:pic>
         <p:nvPicPr>
-          <p:cNvPr id="158" name="Иконка_1_Акцент" descr="/home/claude/vistas/assets/grad_square.png"/>
+          <p:cNvPr id="156" name="Иконка_1_Акцент" descr="/home/claude/vistas/assets/grad_square.png"/>
           <p:cNvPicPr/>
           <p:nvPr/>
         </p:nvPicPr>
@@ -4420,7 +4426,7 @@
       </p:pic>
       <p:sp>
         <p:nvSpPr>
-          <p:cNvPr id="159" name="Линия_1"/>
+          <p:cNvPr id="157" name="Линия_1"/>
           <p:cNvSpPr/>
           <p:nvPr/>
         </p:nvSpPr>
@@ -4448,7 +4454,7 @@
       </p:sp>
       <p:sp>
         <p:nvSpPr>
-          <p:cNvPr id="160" name="SUBTITLE 2"/>
+          <p:cNvPr id="158" name="SUBTITLE 2"/>
           <p:cNvSpPr/>
           <p:nvPr/>
         </p:nvSpPr>
@@ -4503,7 +4509,7 @@
       </p:sp>
       <p:sp>
         <p:nvSpPr>
-          <p:cNvPr id="161" name="TEXT 2"/>
+          <p:cNvPr id="159" name="TEXT 2"/>
           <p:cNvSpPr/>
           <p:nvPr/>
         </p:nvSpPr>
@@ -4558,7 +4564,7 @@
       </p:sp>
       <p:sp>
         <p:nvSpPr>
-          <p:cNvPr id="162" name="Иконка_1"/>
+          <p:cNvPr id="160" name="Иконка_1"/>
           <p:cNvSpPr/>
           <p:nvPr/>
         </p:nvSpPr>
@@ -4591,7 +4597,7 @@
       </p:sp>
       <p:pic>
         <p:nvPicPr>
-          <p:cNvPr id="163" name="Иконка_1_Акцент" descr="/home/claude/vistas/assets/grad_square.png"/>
+          <p:cNvPr id="161" name="Иконка_1_Акцент" descr="/home/claude/vistas/assets/grad_square.png"/>
           <p:cNvPicPr/>
           <p:nvPr/>
         </p:nvPicPr>
@@ -4614,7 +4620,7 @@
       </p:pic>
       <p:sp>
         <p:nvSpPr>
-          <p:cNvPr id="164" name="Линия_1"/>
+          <p:cNvPr id="162" name="Линия_1"/>
           <p:cNvSpPr/>
           <p:nvPr/>
         </p:nvSpPr>
@@ -4642,7 +4648,7 @@
       </p:sp>
       <p:sp>
         <p:nvSpPr>
-          <p:cNvPr id="165" name="SUBTITLE 2"/>
+          <p:cNvPr id="163" name="SUBTITLE 2"/>
           <p:cNvSpPr/>
           <p:nvPr/>
         </p:nvSpPr>
@@ -4697,7 +4703,7 @@
       </p:sp>
       <p:sp>
         <p:nvSpPr>
-          <p:cNvPr id="166" name="TEXT 2"/>
+          <p:cNvPr id="164" name="TEXT 2"/>
           <p:cNvSpPr/>
           <p:nvPr/>
         </p:nvSpPr>
@@ -4752,7 +4758,7 @@
       </p:sp>
       <p:sp>
         <p:nvSpPr>
-          <p:cNvPr id="167" name="Иконка_1"/>
+          <p:cNvPr id="165" name="Иконка_1"/>
           <p:cNvSpPr/>
           <p:nvPr/>
         </p:nvSpPr>
@@ -4785,7 +4791,7 @@
       </p:sp>
       <p:pic>
         <p:nvPicPr>
-          <p:cNvPr id="168" name="Иконка_1_Акцент" descr="/home/claude/vistas/assets/grad_square.png"/>
+          <p:cNvPr id="166" name="Иконка_1_Акцент" descr="/home/claude/vistas/assets/grad_square.png"/>
           <p:cNvPicPr/>
           <p:nvPr/>
         </p:nvPicPr>
@@ -4845,7 +4851,7 @@
       </p:grpSpPr>
       <p:pic>
         <p:nvPicPr>
-          <p:cNvPr id="169" name="Градиент_Фон" descr="/home/claude/vistas/assets/grad_full_diagonal.png"/>
+          <p:cNvPr id="167" name="Градиент_Фон" descr="/home/claude/vistas/assets/grad_full_diagonal.png"/>
           <p:cNvPicPr/>
           <p:nvPr/>
         </p:nvPicPr>
@@ -4868,7 +4874,7 @@
       </p:pic>
       <p:sp>
         <p:nvSpPr>
-          <p:cNvPr id="170" name="TITLE"/>
+          <p:cNvPr id="168" name="TITLE"/>
           <p:cNvSpPr/>
           <p:nvPr/>
         </p:nvSpPr>
@@ -8149,67 +8155,14 @@
       </p:grpSpPr>
       <p:sp>
         <p:nvSpPr>
-          <p:cNvPr id="110" name="Затемнение"/>
-          <p:cNvSpPr/>
-          <p:nvPr/>
-        </p:nvSpPr>
-        <p:spPr>
-          <a:xfrm>
-            <a:off x="0" y="1328040"/>
-            <a:ext cx="12188520" cy="5529600"/>
-          </a:xfrm>
-          <a:prstGeom prst="rect">
-            <a:avLst/>
-          </a:prstGeom>
-          <a:solidFill>
-            <a:srgbClr val="d9d9d9"/>
-          </a:solidFill>
-          <a:ln w="0">
-            <a:noFill/>
-          </a:ln>
-        </p:spPr>
-        <p:style>
-          <a:lnRef idx="0"/>
-          <a:fillRef idx="0"/>
-          <a:effectRef idx="0"/>
-          <a:fontRef idx="minor"/>
-        </p:style>
-        <p:txBody>
-          <a:bodyPr lIns="90000" rIns="90000" tIns="45000" bIns="45000" anchor="ctr">
-            <a:noAutofit/>
-          </a:bodyPr>
-          <a:p>
-            <a:pPr algn="ctr">
-              <a:lnSpc>
-                <a:spcPct val="100000"/>
-              </a:lnSpc>
-              <a:buNone/>
-            </a:pPr>
-            <a:r>
-              <a:rPr b="0" lang="en-US" sz="1800" spc="-1" strike="noStrike">
-                <a:solidFill>
-                  <a:srgbClr val="ffffff"/>
-                </a:solidFill>
-                <a:latin typeface="Calibri"/>
-              </a:rPr>
-              <a:t>PIC</a:t>
-            </a:r>
-            <a:endParaRPr b="0" lang="en-US" sz="1800" spc="-1" strike="noStrike">
-              <a:latin typeface="Arial"/>
-            </a:endParaRPr>
-          </a:p>
-        </p:txBody>
-      </p:sp>
-      <p:sp>
-        <p:nvSpPr>
-          <p:cNvPr id="111" name="Чип_1"/>
-          <p:cNvSpPr/>
-          <p:nvPr/>
-        </p:nvSpPr>
-        <p:spPr>
-          <a:xfrm>
-            <a:off x="474480" y="5290560"/>
-            <a:ext cx="4673880" cy="1255680"/>
+          <p:cNvPr id="110" name="Чип_1"/>
+          <p:cNvSpPr/>
+          <p:nvPr/>
+        </p:nvSpPr>
+        <p:spPr>
+          <a:xfrm>
+            <a:off x="639360" y="5290560"/>
+            <a:ext cx="5315040" cy="1255680"/>
           </a:xfrm>
           <a:prstGeom prst="roundRect">
             <a:avLst>
@@ -8237,13 +8190,13 @@
       </p:sp>
       <p:sp>
         <p:nvSpPr>
-          <p:cNvPr id="112" name="SUBTITLE 2"/>
-          <p:cNvSpPr/>
-          <p:nvPr/>
-        </p:nvSpPr>
-        <p:spPr>
-          <a:xfrm>
-            <a:off x="639360" y="5413320"/>
+          <p:cNvPr id="111" name="SUBTITLE 2"/>
+          <p:cNvSpPr/>
+          <p:nvPr/>
+        </p:nvSpPr>
+        <p:spPr>
+          <a:xfrm>
+            <a:off x="803880" y="5413320"/>
             <a:ext cx="4345920" cy="465480"/>
           </a:xfrm>
           <a:prstGeom prst="rect">
@@ -8292,13 +8245,13 @@
       </p:sp>
       <p:sp>
         <p:nvSpPr>
-          <p:cNvPr id="113" name="TEXT 2"/>
-          <p:cNvSpPr/>
-          <p:nvPr/>
-        </p:nvSpPr>
-        <p:spPr>
-          <a:xfrm>
-            <a:off x="639360" y="5952240"/>
+          <p:cNvPr id="112" name="TEXT 2"/>
+          <p:cNvSpPr/>
+          <p:nvPr/>
+        </p:nvSpPr>
+        <p:spPr>
+          <a:xfrm>
+            <a:off x="803880" y="5952240"/>
             <a:ext cx="4345920" cy="502560"/>
           </a:xfrm>
           <a:prstGeom prst="rect">
@@ -8345,94 +8298,16 @@
           </a:p>
         </p:txBody>
       </p:sp>
-      <p:pic>
-        <p:nvPicPr>
-          <p:cNvPr id="114" name="Кнопка_Навигация_Фон" descr="/home/claude/vistas/assets/grad_circle.png"/>
-          <p:cNvPicPr/>
-          <p:nvPr/>
-        </p:nvPicPr>
-        <p:blipFill>
-          <a:blip r:embed="rId1"/>
-          <a:stretch/>
-        </p:blipFill>
-        <p:spPr>
-          <a:xfrm>
-            <a:off x="11228760" y="5897880"/>
-            <a:ext cx="502560" cy="502560"/>
-          </a:xfrm>
-          <a:prstGeom prst="rect">
-            <a:avLst/>
-          </a:prstGeom>
-          <a:ln w="0">
-            <a:noFill/>
-          </a:ln>
-        </p:spPr>
-      </p:pic>
-      <p:sp>
-        <p:nvSpPr>
-          <p:cNvPr id="115" name="Кнопка_Навигация_Стрелка"/>
-          <p:cNvSpPr/>
-          <p:nvPr/>
-        </p:nvSpPr>
-        <p:spPr>
-          <a:xfrm>
-            <a:off x="11228760" y="5897880"/>
-            <a:ext cx="502560" cy="502560"/>
-          </a:xfrm>
-          <a:prstGeom prst="rect">
-            <a:avLst/>
-          </a:prstGeom>
-          <a:noFill/>
-          <a:ln w="0">
-            <a:noFill/>
-          </a:ln>
-        </p:spPr>
-        <p:style>
-          <a:lnRef idx="0"/>
-          <a:fillRef idx="0"/>
-          <a:effectRef idx="0"/>
-          <a:fontRef idx="minor"/>
-        </p:style>
-        <p:txBody>
-          <a:bodyPr lIns="0" rIns="0" tIns="0" bIns="0" anchor="ctr">
-            <a:noAutofit/>
-          </a:bodyPr>
-          <a:p>
-            <a:pPr algn="ctr">
-              <a:lnSpc>
-                <a:spcPct val="100000"/>
-              </a:lnSpc>
-              <a:buNone/>
-              <a:tabLst>
-                <a:tab algn="l" pos="0"/>
-              </a:tabLst>
-            </a:pPr>
-            <a:r>
-              <a:rPr b="1" lang="en-US" sz="2000" spc="-1" strike="noStrike">
-                <a:solidFill>
-                  <a:srgbClr val="ffffff"/>
-                </a:solidFill>
-                <a:latin typeface="Arial"/>
-                <a:ea typeface="Arial"/>
-              </a:rPr>
-              <a:t>→</a:t>
-            </a:r>
-            <a:endParaRPr b="0" lang="en-US" sz="2000" spc="-1" strike="noStrike">
-              <a:latin typeface="Arial"/>
-            </a:endParaRPr>
-          </a:p>
-        </p:txBody>
-      </p:sp>
-      <p:sp>
-        <p:nvSpPr>
-          <p:cNvPr id="116" name="Чип_1"/>
-          <p:cNvSpPr/>
-          <p:nvPr/>
-        </p:nvSpPr>
-        <p:spPr>
-          <a:xfrm>
-            <a:off x="5677560" y="5290560"/>
-            <a:ext cx="4673880" cy="1255680"/>
+      <p:sp>
+        <p:nvSpPr>
+          <p:cNvPr id="113" name="Чип_1"/>
+          <p:cNvSpPr/>
+          <p:nvPr/>
+        </p:nvSpPr>
+        <p:spPr>
+          <a:xfrm>
+            <a:off x="6234480" y="5290560"/>
+            <a:ext cx="5313240" cy="1255680"/>
           </a:xfrm>
           <a:prstGeom prst="roundRect">
             <a:avLst>
@@ -8460,13 +8335,13 @@
       </p:sp>
       <p:sp>
         <p:nvSpPr>
-          <p:cNvPr id="117" name="SUBTITLE 2"/>
-          <p:cNvSpPr/>
-          <p:nvPr/>
-        </p:nvSpPr>
-        <p:spPr>
-          <a:xfrm>
-            <a:off x="5842080" y="5413320"/>
+          <p:cNvPr id="114" name="SUBTITLE 2"/>
+          <p:cNvSpPr/>
+          <p:nvPr/>
+        </p:nvSpPr>
+        <p:spPr>
+          <a:xfrm>
+            <a:off x="6399000" y="5413320"/>
             <a:ext cx="4345920" cy="465480"/>
           </a:xfrm>
           <a:prstGeom prst="rect">
@@ -8525,13 +8400,13 @@
       </p:sp>
       <p:sp>
         <p:nvSpPr>
-          <p:cNvPr id="118" name="TEXT 2"/>
-          <p:cNvSpPr/>
-          <p:nvPr/>
-        </p:nvSpPr>
-        <p:spPr>
-          <a:xfrm>
-            <a:off x="5842080" y="5952240"/>
+          <p:cNvPr id="115" name="TEXT 2"/>
+          <p:cNvSpPr/>
+          <p:nvPr/>
+        </p:nvSpPr>
+        <p:spPr>
+          <a:xfrm>
+            <a:off x="6399000" y="5952240"/>
             <a:ext cx="4345920" cy="502560"/>
           </a:xfrm>
           <a:prstGeom prst="rect">
@@ -8590,14 +8465,14 @@
       </p:sp>
       <p:sp>
         <p:nvSpPr>
-          <p:cNvPr id="119" name="Чип_1"/>
-          <p:cNvSpPr/>
-          <p:nvPr/>
-        </p:nvSpPr>
-        <p:spPr>
-          <a:xfrm>
-            <a:off x="474480" y="4143240"/>
-            <a:ext cx="9876960" cy="977040"/>
+          <p:cNvPr id="116" name="Чип_1"/>
+          <p:cNvSpPr/>
+          <p:nvPr/>
+        </p:nvSpPr>
+        <p:spPr>
+          <a:xfrm>
+            <a:off x="639360" y="4143240"/>
+            <a:ext cx="10908360" cy="977040"/>
           </a:xfrm>
           <a:prstGeom prst="roundRect">
             <a:avLst>
@@ -8625,13 +8500,13 @@
       </p:sp>
       <p:sp>
         <p:nvSpPr>
-          <p:cNvPr id="120" name="SUBTITLE 2"/>
-          <p:cNvSpPr/>
-          <p:nvPr/>
-        </p:nvSpPr>
-        <p:spPr>
-          <a:xfrm>
-            <a:off x="639360" y="4143240"/>
+          <p:cNvPr id="117" name="SUBTITLE 2"/>
+          <p:cNvSpPr/>
+          <p:nvPr/>
+        </p:nvSpPr>
+        <p:spPr>
+          <a:xfrm>
+            <a:off x="803880" y="4143240"/>
             <a:ext cx="9549000" cy="309600"/>
           </a:xfrm>
           <a:prstGeom prst="rect">
@@ -8690,13 +8565,13 @@
       </p:sp>
       <p:sp>
         <p:nvSpPr>
-          <p:cNvPr id="121" name="TEXT 2"/>
-          <p:cNvSpPr/>
-          <p:nvPr/>
-        </p:nvSpPr>
-        <p:spPr>
-          <a:xfrm>
-            <a:off x="639360" y="4526280"/>
+          <p:cNvPr id="118" name="TEXT 2"/>
+          <p:cNvSpPr/>
+          <p:nvPr/>
+        </p:nvSpPr>
+        <p:spPr>
+          <a:xfrm>
+            <a:off x="803880" y="4526280"/>
             <a:ext cx="9549000" cy="502560"/>
           </a:xfrm>
           <a:prstGeom prst="rect">
@@ -8755,7 +8630,7 @@
       </p:sp>
       <p:sp>
         <p:nvSpPr>
-          <p:cNvPr id="122" name="TITLE"/>
+          <p:cNvPr id="119" name="TITLE"/>
           <p:cNvSpPr/>
           <p:nvPr/>
         </p:nvSpPr>
@@ -8803,6 +8678,66 @@
               <a:t>TITLE</a:t>
             </a:r>
             <a:endParaRPr b="0" lang="en-US" sz="3200" spc="-1" strike="noStrike">
+              <a:latin typeface="Arial"/>
+            </a:endParaRPr>
+          </a:p>
+        </p:txBody>
+      </p:sp>
+      <p:sp>
+        <p:nvSpPr>
+          <p:cNvPr id="120" name="PIC 1"/>
+          <p:cNvSpPr/>
+          <p:nvPr/>
+        </p:nvSpPr>
+        <p:spPr>
+          <a:xfrm>
+            <a:off x="638280" y="1410840"/>
+            <a:ext cx="10908360" cy="2447640"/>
+          </a:xfrm>
+          <a:prstGeom prst="roundRect">
+            <a:avLst>
+              <a:gd name="adj" fmla="val 4706"/>
+            </a:avLst>
+          </a:prstGeom>
+          <a:solidFill>
+            <a:schemeClr val="bg1">
+              <a:lumMod val="85000"/>
+            </a:schemeClr>
+          </a:solidFill>
+          <a:ln w="9525">
+            <a:solidFill>
+              <a:srgbClr val="6e6e6e"/>
+            </a:solidFill>
+            <a:round/>
+          </a:ln>
+        </p:spPr>
+        <p:style>
+          <a:lnRef idx="0"/>
+          <a:fillRef idx="0"/>
+          <a:effectRef idx="0"/>
+          <a:fontRef idx="minor"/>
+        </p:style>
+        <p:txBody>
+          <a:bodyPr lIns="90000" rIns="90000" tIns="45000" bIns="45000" anchor="ctr">
+            <a:noAutofit/>
+          </a:bodyPr>
+          <a:p>
+            <a:pPr algn="ctr">
+              <a:lnSpc>
+                <a:spcPct val="100000"/>
+              </a:lnSpc>
+              <a:buNone/>
+            </a:pPr>
+            <a:r>
+              <a:rPr b="0" lang="en-US" sz="1800" spc="-1" strike="noStrike">
+                <a:solidFill>
+                  <a:srgbClr val="ffffff"/>
+                </a:solidFill>
+                <a:latin typeface="Calibri"/>
+              </a:rPr>
+              <a:t>PIC</a:t>
+            </a:r>
+            <a:endParaRPr b="0" lang="en-US" sz="1800" spc="-1" strike="noStrike">
               <a:latin typeface="Arial"/>
             </a:endParaRPr>
           </a:p>
@@ -8847,7 +8782,7 @@
       </p:grpSpPr>
       <p:sp>
         <p:nvSpPr>
-          <p:cNvPr id="123" name="Блок_3"/>
+          <p:cNvPr id="121" name="Блок_3"/>
           <p:cNvSpPr/>
           <p:nvPr/>
         </p:nvSpPr>
@@ -8880,7 +8815,7 @@
       </p:sp>
       <p:sp>
         <p:nvSpPr>
-          <p:cNvPr id="124" name="Блок_1"/>
+          <p:cNvPr id="122" name="Блок_1"/>
           <p:cNvSpPr/>
           <p:nvPr/>
         </p:nvSpPr>
@@ -8913,7 +8848,7 @@
       </p:sp>
       <p:pic>
         <p:nvPicPr>
-          <p:cNvPr id="125" name="Кнопка_Навигация_Фон" descr="/home/claude/vistas/assets/grad_circle.png"/>
+          <p:cNvPr id="123" name="Кнопка_Навигация_Фон" descr="/home/claude/vistas/assets/grad_circle.png"/>
           <p:cNvPicPr/>
           <p:nvPr/>
         </p:nvPicPr>
@@ -8936,7 +8871,7 @@
       </p:pic>
       <p:sp>
         <p:nvSpPr>
-          <p:cNvPr id="126" name="SUBTITLE 1"/>
+          <p:cNvPr id="124" name="SUBTITLE 1"/>
           <p:cNvSpPr/>
           <p:nvPr/>
         </p:nvSpPr>
@@ -8991,7 +8926,7 @@
       </p:sp>
       <p:sp>
         <p:nvSpPr>
-          <p:cNvPr id="127" name="TEXT 1"/>
+          <p:cNvPr id="125" name="TEXT 1"/>
           <p:cNvSpPr/>
           <p:nvPr/>
         </p:nvSpPr>
@@ -9046,7 +8981,7 @@
       </p:sp>
       <p:sp>
         <p:nvSpPr>
-          <p:cNvPr id="128" name="Блок_2"/>
+          <p:cNvPr id="126" name="Блок_2"/>
           <p:cNvSpPr/>
           <p:nvPr/>
         </p:nvSpPr>
@@ -9079,7 +9014,7 @@
       </p:sp>
       <p:sp>
         <p:nvSpPr>
-          <p:cNvPr id="129" name="SUBTITLE 2"/>
+          <p:cNvPr id="127" name="SUBTITLE 2"/>
           <p:cNvSpPr/>
           <p:nvPr/>
         </p:nvSpPr>
@@ -9134,7 +9069,7 @@
       </p:sp>
       <p:sp>
         <p:nvSpPr>
-          <p:cNvPr id="130" name="TEXT 2"/>
+          <p:cNvPr id="128" name="TEXT 2"/>
           <p:cNvSpPr/>
           <p:nvPr/>
         </p:nvSpPr>
@@ -9189,7 +9124,7 @@
       </p:sp>
       <p:sp>
         <p:nvSpPr>
-          <p:cNvPr id="131" name="SUBTITLE 3"/>
+          <p:cNvPr id="129" name="SUBTITLE 3"/>
           <p:cNvSpPr/>
           <p:nvPr/>
         </p:nvSpPr>
@@ -9244,7 +9179,7 @@
       </p:sp>
       <p:sp>
         <p:nvSpPr>
-          <p:cNvPr id="132" name="TEXT 3"/>
+          <p:cNvPr id="130" name="TEXT 3"/>
           <p:cNvSpPr/>
           <p:nvPr/>
         </p:nvSpPr>
@@ -9299,7 +9234,7 @@
       </p:sp>
       <p:sp>
         <p:nvSpPr>
-          <p:cNvPr id="133" name="TITLE"/>
+          <p:cNvPr id="131" name="TITLE"/>
           <p:cNvSpPr/>
           <p:nvPr/>
         </p:nvSpPr>
@@ -9354,7 +9289,7 @@
       </p:sp>
       <p:sp>
         <p:nvSpPr>
-          <p:cNvPr id="134" name="Кнопка_Навигация_Стрелка"/>
+          <p:cNvPr id="132" name="Кнопка_Навигация_Стрелка"/>
           <p:cNvSpPr/>
           <p:nvPr/>
         </p:nvSpPr>
@@ -9446,7 +9381,7 @@
       </p:grpSpPr>
       <p:sp>
         <p:nvSpPr>
-          <p:cNvPr id="135" name="Карточка_1"/>
+          <p:cNvPr id="133" name="Карточка_1"/>
           <p:cNvSpPr/>
           <p:nvPr/>
         </p:nvSpPr>
@@ -9479,7 +9414,7 @@
       </p:sp>
       <p:sp>
         <p:nvSpPr>
-          <p:cNvPr id="136" name="PIC 1"/>
+          <p:cNvPr id="134" name="PIC 1"/>
           <p:cNvSpPr/>
           <p:nvPr/>
         </p:nvSpPr>
@@ -9537,7 +9472,7 @@
       </p:sp>
       <p:sp>
         <p:nvSpPr>
-          <p:cNvPr id="137" name="SUBTITLE 1"/>
+          <p:cNvPr id="135" name="SUBTITLE 1"/>
           <p:cNvSpPr/>
           <p:nvPr/>
         </p:nvSpPr>
@@ -9592,7 +9527,7 @@
       </p:sp>
       <p:sp>
         <p:nvSpPr>
-          <p:cNvPr id="138" name="TEXT 1"/>
+          <p:cNvPr id="136" name="TEXT 1"/>
           <p:cNvSpPr/>
           <p:nvPr/>
         </p:nvSpPr>
@@ -9647,7 +9582,7 @@
       </p:sp>
       <p:sp>
         <p:nvSpPr>
-          <p:cNvPr id="139" name="Карточка_2"/>
+          <p:cNvPr id="137" name="Карточка_2"/>
           <p:cNvSpPr/>
           <p:nvPr/>
         </p:nvSpPr>
@@ -9680,7 +9615,7 @@
       </p:sp>
       <p:sp>
         <p:nvSpPr>
-          <p:cNvPr id="140" name="PIC 2"/>
+          <p:cNvPr id="138" name="PIC 2"/>
           <p:cNvSpPr/>
           <p:nvPr/>
         </p:nvSpPr>
@@ -9738,7 +9673,7 @@
       </p:sp>
       <p:sp>
         <p:nvSpPr>
-          <p:cNvPr id="141" name="SUBTITLE 2"/>
+          <p:cNvPr id="139" name="SUBTITLE 2"/>
           <p:cNvSpPr/>
           <p:nvPr/>
         </p:nvSpPr>
@@ -9793,7 +9728,7 @@
       </p:sp>
       <p:sp>
         <p:nvSpPr>
-          <p:cNvPr id="142" name="TEXT 2"/>
+          <p:cNvPr id="140" name="TEXT 2"/>
           <p:cNvSpPr/>
           <p:nvPr/>
         </p:nvSpPr>
@@ -9848,7 +9783,7 @@
       </p:sp>
       <p:sp>
         <p:nvSpPr>
-          <p:cNvPr id="143" name="Карточка_3"/>
+          <p:cNvPr id="141" name="Карточка_3"/>
           <p:cNvSpPr/>
           <p:nvPr/>
         </p:nvSpPr>
@@ -9881,7 +9816,7 @@
       </p:sp>
       <p:sp>
         <p:nvSpPr>
-          <p:cNvPr id="144" name="PIC 3"/>
+          <p:cNvPr id="142" name="PIC 3"/>
           <p:cNvSpPr/>
           <p:nvPr/>
         </p:nvSpPr>
@@ -9939,7 +9874,7 @@
       </p:sp>
       <p:sp>
         <p:nvSpPr>
-          <p:cNvPr id="145" name="SUBTITLE 3"/>
+          <p:cNvPr id="143" name="SUBTITLE 3"/>
           <p:cNvSpPr/>
           <p:nvPr/>
         </p:nvSpPr>
@@ -9994,7 +9929,7 @@
       </p:sp>
       <p:sp>
         <p:nvSpPr>
-          <p:cNvPr id="146" name="TEXT 3"/>
+          <p:cNvPr id="144" name="TEXT 3"/>
           <p:cNvSpPr/>
           <p:nvPr/>
         </p:nvSpPr>
@@ -10049,7 +9984,7 @@
       </p:sp>
       <p:sp>
         <p:nvSpPr>
-          <p:cNvPr id="147" name="TITLE"/>
+          <p:cNvPr id="145" name="TITLE"/>
           <p:cNvSpPr/>
           <p:nvPr/>
         </p:nvSpPr>
@@ -10104,7 +10039,7 @@
       </p:sp>
       <p:pic>
         <p:nvPicPr>
-          <p:cNvPr id="148" name="Кнопка_Навигация_Фон" descr="/home/claude/vistas/assets/grad_circle.png"/>
+          <p:cNvPr id="146" name="Кнопка_Навигация_Фон" descr="/home/claude/vistas/assets/grad_circle.png"/>
           <p:cNvPicPr/>
           <p:nvPr/>
         </p:nvPicPr>
@@ -10127,7 +10062,7 @@
       </p:pic>
       <p:sp>
         <p:nvSpPr>
-          <p:cNvPr id="149" name="Кнопка_Навигация_Стрелка"/>
+          <p:cNvPr id="147" name="Кнопка_Навигация_Стрелка"/>
           <p:cNvSpPr/>
           <p:nvPr/>
         </p:nvSpPr>
